--- a/Projeto de Software e Segurança da Informação - 2025/Segurança da Informação/Aula 06 - ISO 27001 - Módulo 1-2/ISO 27001.pptx
+++ b/Projeto de Software e Segurança da Informação - 2025/Segurança da Informação/Aula 06 - ISO 27001 - Módulo 1-2/ISO 27001.pptx
@@ -260,7 +260,7 @@
           <a:p>
             <a:fld id="{FCBB45FB-FC1C-4893-B550-48C1193193C6}" type="datetimeFigureOut">
               <a:rPr lang="pt-BR" smtClean="0"/>
-              <a:t>21/04/2025</a:t>
+              <a:t>22/03/2026</a:t>
             </a:fld>
             <a:endParaRPr lang="pt-BR"/>
           </a:p>
@@ -1131,7 +1131,7 @@
           <a:p>
             <a:fld id="{CDD55C27-F8C6-4481-8569-CAC50CAE9F1F}" type="datetimeFigureOut">
               <a:rPr lang="pt-BR" smtClean="0"/>
-              <a:t>21/04/2025</a:t>
+              <a:t>22/03/2026</a:t>
             </a:fld>
             <a:endParaRPr lang="pt-BR"/>
           </a:p>
@@ -1723,7 +1723,7 @@
           <a:p>
             <a:fld id="{CDD55C27-F8C6-4481-8569-CAC50CAE9F1F}" type="datetimeFigureOut">
               <a:rPr lang="pt-BR" smtClean="0"/>
-              <a:t>21/04/2025</a:t>
+              <a:t>22/03/2026</a:t>
             </a:fld>
             <a:endParaRPr lang="pt-BR"/>
           </a:p>
@@ -2026,7 +2026,7 @@
           <a:p>
             <a:fld id="{CDD55C27-F8C6-4481-8569-CAC50CAE9F1F}" type="datetimeFigureOut">
               <a:rPr lang="pt-BR" smtClean="0"/>
-              <a:t>21/04/2025</a:t>
+              <a:t>22/03/2026</a:t>
             </a:fld>
             <a:endParaRPr lang="pt-BR"/>
           </a:p>
@@ -2477,7 +2477,7 @@
           <a:p>
             <a:fld id="{CDD55C27-F8C6-4481-8569-CAC50CAE9F1F}" type="datetimeFigureOut">
               <a:rPr lang="pt-BR" smtClean="0"/>
-              <a:t>21/04/2025</a:t>
+              <a:t>22/03/2026</a:t>
             </a:fld>
             <a:endParaRPr lang="pt-BR"/>
           </a:p>
@@ -2650,7 +2650,7 @@
           <a:p>
             <a:fld id="{CDD55C27-F8C6-4481-8569-CAC50CAE9F1F}" type="datetimeFigureOut">
               <a:rPr lang="pt-BR" smtClean="0"/>
-              <a:t>21/04/2025</a:t>
+              <a:t>22/03/2026</a:t>
             </a:fld>
             <a:endParaRPr lang="pt-BR"/>
           </a:p>
@@ -2787,7 +2787,7 @@
           <a:p>
             <a:fld id="{CDD55C27-F8C6-4481-8569-CAC50CAE9F1F}" type="datetimeFigureOut">
               <a:rPr lang="pt-BR" smtClean="0"/>
-              <a:t>21/04/2025</a:t>
+              <a:t>22/03/2026</a:t>
             </a:fld>
             <a:endParaRPr lang="pt-BR"/>
           </a:p>
@@ -3131,7 +3131,7 @@
           <a:p>
             <a:fld id="{CDD55C27-F8C6-4481-8569-CAC50CAE9F1F}" type="datetimeFigureOut">
               <a:rPr lang="pt-BR" smtClean="0"/>
-              <a:t>21/04/2025</a:t>
+              <a:t>22/03/2026</a:t>
             </a:fld>
             <a:endParaRPr lang="pt-BR"/>
           </a:p>
@@ -3452,7 +3452,7 @@
           <a:p>
             <a:fld id="{CDD55C27-F8C6-4481-8569-CAC50CAE9F1F}" type="datetimeFigureOut">
               <a:rPr lang="pt-BR" smtClean="0"/>
-              <a:t>21/04/2025</a:t>
+              <a:t>22/03/2026</a:t>
             </a:fld>
             <a:endParaRPr lang="pt-BR"/>
           </a:p>
@@ -11706,7 +11706,7 @@
             </a:r>
             <a:r>
               <a:rPr lang="pt-BR" sz="1800" dirty="0"/>
-              <a:t> que podem comprometer a segurança da informação em uma organização, possuindo as analises quantitativas e qualitativas:</a:t>
+              <a:t> que podem comprometer a segurança da informação em uma organização, possuindo as análises quantitativas e qualitativas:</a:t>
             </a:r>
           </a:p>
           <a:p>
@@ -11728,7 +11728,7 @@
             </a:pPr>
             <a:r>
               <a:rPr lang="pt-BR" sz="1800" b="1" dirty="0"/>
-              <a:t>Análise Quantitativa</a:t>
+              <a:t>Análise Qualitativa</a:t>
             </a:r>
           </a:p>
           <a:p>
